--- a/public/presentaciones/MANUAL DE USABILIDAD RAGGED DIGITAL.pptx
+++ b/public/presentaciones/MANUAL DE USABILIDAD RAGGED DIGITAL.pptx
@@ -125,12 +125,38 @@
 <file path=ppt/revisionInfo.xml><?xml version="1.0" encoding="utf-8"?>
 <p1510:revInfo xmlns:a="http://schemas.openxmlformats.org/drawingml/2006/main" xmlns:r="http://schemas.openxmlformats.org/officeDocument/2006/relationships" xmlns:p1510="http://schemas.microsoft.com/office/powerpoint/2015/10/main">
   <p1510:revLst>
-    <p1510:client id="{3337D375-F495-C3B2-29D3-1E5236A13944}" v="406" dt="2024-10-08T19:57:34.830"/>
-    <p1510:client id="{CD21C9EF-D09C-C46C-555A-4A9D2C20B623}" v="439" dt="2024-10-08T20:41:47.971"/>
-    <p1510:client id="{DEF04855-EA4F-AFFC-65A8-C2AE9822C87E}" v="432" dt="2024-10-07T21:01:19.013"/>
-    <p1510:client id="{F3995C63-9364-AE37-88AE-7D491309BB53}" v="578" dt="2024-10-07T14:22:10.348"/>
+    <p1510:client id="{F545BA79-B533-D8AD-7403-3EBD1A1D2335}" v="86" dt="2025-02-21T14:31:23.225"/>
   </p1510:revLst>
 </p1510:revInfo>
+</file>
+
+<file path=ppt/changesInfos/changesInfo1.xml><?xml version="1.0" encoding="utf-8"?>
+<pc:chgInfo xmlns:a="http://schemas.openxmlformats.org/drawingml/2006/main" xmlns:r="http://schemas.openxmlformats.org/officeDocument/2006/relationships" xmlns:ac="http://schemas.microsoft.com/office/drawing/2013/main/command" xmlns:pc="http://schemas.microsoft.com/office/powerpoint/2013/main/command">
+  <pc:docChgLst>
+    <pc:chgData name="Elizabeth Cristina Zapata Quiceno" userId="S::analistasolucionesti1@ragged.com.co::9c4aa96f-173b-4129-adde-e680cb5a3e13" providerId="AD" clId="Web-{F545BA79-B533-D8AD-7403-3EBD1A1D2335}"/>
+    <pc:docChg chg="modSld">
+      <pc:chgData name="Elizabeth Cristina Zapata Quiceno" userId="S::analistasolucionesti1@ragged.com.co::9c4aa96f-173b-4129-adde-e680cb5a3e13" providerId="AD" clId="Web-{F545BA79-B533-D8AD-7403-3EBD1A1D2335}" dt="2025-02-21T14:31:23.225" v="52" actId="20577"/>
+      <pc:docMkLst>
+        <pc:docMk/>
+      </pc:docMkLst>
+      <pc:sldChg chg="modSp">
+        <pc:chgData name="Elizabeth Cristina Zapata Quiceno" userId="S::analistasolucionesti1@ragged.com.co::9c4aa96f-173b-4129-adde-e680cb5a3e13" providerId="AD" clId="Web-{F545BA79-B533-D8AD-7403-3EBD1A1D2335}" dt="2025-02-21T14:31:23.225" v="52" actId="20577"/>
+        <pc:sldMkLst>
+          <pc:docMk/>
+          <pc:sldMk cId="2647247410" sldId="262"/>
+        </pc:sldMkLst>
+        <pc:spChg chg="mod">
+          <ac:chgData name="Elizabeth Cristina Zapata Quiceno" userId="S::analistasolucionesti1@ragged.com.co::9c4aa96f-173b-4129-adde-e680cb5a3e13" providerId="AD" clId="Web-{F545BA79-B533-D8AD-7403-3EBD1A1D2335}" dt="2025-02-21T14:31:23.225" v="52" actId="20577"/>
+          <ac:spMkLst>
+            <pc:docMk/>
+            <pc:sldMk cId="2647247410" sldId="262"/>
+            <ac:spMk id="9" creationId="{63177196-A2A0-9D2A-4876-EC680DC962FC}"/>
+          </ac:spMkLst>
+        </pc:spChg>
+      </pc:sldChg>
+    </pc:docChg>
+  </pc:docChgLst>
+</pc:chgInfo>
 </file>
 
 <file path=ppt/notesMasters/notesMaster1.xml><?xml version="1.0" encoding="utf-8"?>
@@ -215,7 +241,7 @@
           <a:p>
             <a:fld id="{6399F1E3-EAD7-4CA7-8B45-D4FACBFAA813}" type="datetimeFigureOut">
               <a:rPr lang="es-CO" smtClean="0"/>
-              <a:t>12/02/2025</a:t>
+              <a:t>21/02/2025</a:t>
             </a:fld>
             <a:endParaRPr lang="es-CO"/>
           </a:p>
@@ -374,7 +400,7 @@
           <a:p>
             <a:fld id="{29F015B0-A378-4D1A-B4CB-E69631391BE6}" type="slidenum">
               <a:rPr lang="es-CO" smtClean="0"/>
-              <a:t>‹#›</a:t>
+              <a:t>‹Nº›</a:t>
             </a:fld>
             <a:endParaRPr lang="es-CO"/>
           </a:p>
@@ -716,7 +742,7 @@
           <a:p>
             <a:fld id="{08ED071E-B8F8-4C7C-BF2C-3088DF2A4B41}" type="datetimeFigureOut">
               <a:rPr lang="es-CO" smtClean="0"/>
-              <a:t>12/02/2025</a:t>
+              <a:t>21/02/2025</a:t>
             </a:fld>
             <a:endParaRPr lang="es-CO"/>
           </a:p>
@@ -770,7 +796,7 @@
           <a:p>
             <a:fld id="{C9FA13D6-D6C5-4753-B411-D5F0E6B6DDF9}" type="slidenum">
               <a:rPr lang="es-CO" smtClean="0"/>
-              <a:t>‹#›</a:t>
+              <a:t>‹Nº›</a:t>
             </a:fld>
             <a:endParaRPr lang="es-CO"/>
           </a:p>
@@ -916,7 +942,7 @@
           <a:p>
             <a:fld id="{08ED071E-B8F8-4C7C-BF2C-3088DF2A4B41}" type="datetimeFigureOut">
               <a:rPr lang="es-CO" smtClean="0"/>
-              <a:t>12/02/2025</a:t>
+              <a:t>21/02/2025</a:t>
             </a:fld>
             <a:endParaRPr lang="es-CO"/>
           </a:p>
@@ -970,7 +996,7 @@
           <a:p>
             <a:fld id="{C9FA13D6-D6C5-4753-B411-D5F0E6B6DDF9}" type="slidenum">
               <a:rPr lang="es-CO" smtClean="0"/>
-              <a:t>‹#›</a:t>
+              <a:t>‹Nº›</a:t>
             </a:fld>
             <a:endParaRPr lang="es-CO"/>
           </a:p>
@@ -1126,7 +1152,7 @@
           <a:p>
             <a:fld id="{08ED071E-B8F8-4C7C-BF2C-3088DF2A4B41}" type="datetimeFigureOut">
               <a:rPr lang="es-CO" smtClean="0"/>
-              <a:t>12/02/2025</a:t>
+              <a:t>21/02/2025</a:t>
             </a:fld>
             <a:endParaRPr lang="es-CO"/>
           </a:p>
@@ -1180,7 +1206,7 @@
           <a:p>
             <a:fld id="{C9FA13D6-D6C5-4753-B411-D5F0E6B6DDF9}" type="slidenum">
               <a:rPr lang="es-CO" smtClean="0"/>
-              <a:t>‹#›</a:t>
+              <a:t>‹Nº›</a:t>
             </a:fld>
             <a:endParaRPr lang="es-CO"/>
           </a:p>
@@ -1354,7 +1380,7 @@
           <a:p>
             <a:fld id="{4BDFF068-0152-4120-B6A9-271E27CA5DFE}" type="datetimeFigureOut">
               <a:rPr lang="es-CO" smtClean="0"/>
-              <a:t>12/02/2025</a:t>
+              <a:t>21/02/2025</a:t>
             </a:fld>
             <a:endParaRPr lang="es-CO"/>
           </a:p>
@@ -1408,7 +1434,7 @@
           <a:p>
             <a:fld id="{F426A9E8-DD17-4D1B-BEB9-FBDC766E7EE7}" type="slidenum">
               <a:rPr lang="es-CO" smtClean="0"/>
-              <a:t>‹#›</a:t>
+              <a:t>‹Nº›</a:t>
             </a:fld>
             <a:endParaRPr lang="es-CO"/>
           </a:p>
@@ -1600,7 +1626,7 @@
           <a:p>
             <a:fld id="{4BDFF068-0152-4120-B6A9-271E27CA5DFE}" type="datetimeFigureOut">
               <a:rPr lang="es-CO" smtClean="0"/>
-              <a:t>12/02/2025</a:t>
+              <a:t>21/02/2025</a:t>
             </a:fld>
             <a:endParaRPr lang="es-CO"/>
           </a:p>
@@ -1654,7 +1680,7 @@
           <a:p>
             <a:fld id="{F426A9E8-DD17-4D1B-BEB9-FBDC766E7EE7}" type="slidenum">
               <a:rPr lang="es-CO" smtClean="0"/>
-              <a:t>‹#›</a:t>
+              <a:t>‹Nº›</a:t>
             </a:fld>
             <a:endParaRPr lang="es-CO"/>
           </a:p>
@@ -1882,7 +1908,7 @@
           <a:p>
             <a:fld id="{4BDFF068-0152-4120-B6A9-271E27CA5DFE}" type="datetimeFigureOut">
               <a:rPr lang="es-CO" smtClean="0"/>
-              <a:t>12/02/2025</a:t>
+              <a:t>21/02/2025</a:t>
             </a:fld>
             <a:endParaRPr lang="es-CO"/>
           </a:p>
@@ -1936,7 +1962,7 @@
           <a:p>
             <a:fld id="{F426A9E8-DD17-4D1B-BEB9-FBDC766E7EE7}" type="slidenum">
               <a:rPr lang="es-CO" smtClean="0"/>
-              <a:t>‹#›</a:t>
+              <a:t>‹Nº›</a:t>
             </a:fld>
             <a:endParaRPr lang="es-CO"/>
           </a:p>
@@ -2164,7 +2190,7 @@
           <a:p>
             <a:fld id="{4BDFF068-0152-4120-B6A9-271E27CA5DFE}" type="datetimeFigureOut">
               <a:rPr lang="es-CO" smtClean="0"/>
-              <a:t>12/02/2025</a:t>
+              <a:t>21/02/2025</a:t>
             </a:fld>
             <a:endParaRPr lang="es-CO"/>
           </a:p>
@@ -2218,7 +2244,7 @@
           <a:p>
             <a:fld id="{F426A9E8-DD17-4D1B-BEB9-FBDC766E7EE7}" type="slidenum">
               <a:rPr lang="es-CO" smtClean="0"/>
-              <a:t>‹#›</a:t>
+              <a:t>‹Nº›</a:t>
             </a:fld>
             <a:endParaRPr lang="es-CO"/>
           </a:p>
@@ -2594,7 +2620,7 @@
           <a:p>
             <a:fld id="{4BDFF068-0152-4120-B6A9-271E27CA5DFE}" type="datetimeFigureOut">
               <a:rPr lang="es-CO" smtClean="0"/>
-              <a:t>12/02/2025</a:t>
+              <a:t>21/02/2025</a:t>
             </a:fld>
             <a:endParaRPr lang="es-CO"/>
           </a:p>
@@ -2648,7 +2674,7 @@
           <a:p>
             <a:fld id="{F426A9E8-DD17-4D1B-BEB9-FBDC766E7EE7}" type="slidenum">
               <a:rPr lang="es-CO" smtClean="0"/>
-              <a:t>‹#›</a:t>
+              <a:t>‹Nº›</a:t>
             </a:fld>
             <a:endParaRPr lang="es-CO"/>
           </a:p>
@@ -2744,7 +2770,7 @@
           <a:p>
             <a:fld id="{4BDFF068-0152-4120-B6A9-271E27CA5DFE}" type="datetimeFigureOut">
               <a:rPr lang="es-CO" smtClean="0"/>
-              <a:t>12/02/2025</a:t>
+              <a:t>21/02/2025</a:t>
             </a:fld>
             <a:endParaRPr lang="es-CO"/>
           </a:p>
@@ -2798,7 +2824,7 @@
           <a:p>
             <a:fld id="{F426A9E8-DD17-4D1B-BEB9-FBDC766E7EE7}" type="slidenum">
               <a:rPr lang="es-CO" smtClean="0"/>
-              <a:t>‹#›</a:t>
+              <a:t>‹Nº›</a:t>
             </a:fld>
             <a:endParaRPr lang="es-CO"/>
           </a:p>
@@ -2857,7 +2883,7 @@
           <a:p>
             <a:fld id="{4BDFF068-0152-4120-B6A9-271E27CA5DFE}" type="datetimeFigureOut">
               <a:rPr lang="es-CO" smtClean="0"/>
-              <a:t>12/02/2025</a:t>
+              <a:t>21/02/2025</a:t>
             </a:fld>
             <a:endParaRPr lang="es-CO"/>
           </a:p>
@@ -2911,7 +2937,7 @@
           <a:p>
             <a:fld id="{F426A9E8-DD17-4D1B-BEB9-FBDC766E7EE7}" type="slidenum">
               <a:rPr lang="es-CO" smtClean="0"/>
-              <a:t>‹#›</a:t>
+              <a:t>‹Nº›</a:t>
             </a:fld>
             <a:endParaRPr lang="es-CO"/>
           </a:p>
@@ -3168,7 +3194,7 @@
           <a:p>
             <a:fld id="{4BDFF068-0152-4120-B6A9-271E27CA5DFE}" type="datetimeFigureOut">
               <a:rPr lang="es-CO" smtClean="0"/>
-              <a:t>12/02/2025</a:t>
+              <a:t>21/02/2025</a:t>
             </a:fld>
             <a:endParaRPr lang="es-CO"/>
           </a:p>
@@ -3222,7 +3248,7 @@
           <a:p>
             <a:fld id="{F426A9E8-DD17-4D1B-BEB9-FBDC766E7EE7}" type="slidenum">
               <a:rPr lang="es-CO" smtClean="0"/>
-              <a:t>‹#›</a:t>
+              <a:t>‹Nº›</a:t>
             </a:fld>
             <a:endParaRPr lang="es-CO"/>
           </a:p>
@@ -3368,7 +3394,7 @@
           <a:p>
             <a:fld id="{08ED071E-B8F8-4C7C-BF2C-3088DF2A4B41}" type="datetimeFigureOut">
               <a:rPr lang="es-CO" smtClean="0"/>
-              <a:t>12/02/2025</a:t>
+              <a:t>21/02/2025</a:t>
             </a:fld>
             <a:endParaRPr lang="es-CO"/>
           </a:p>
@@ -3422,7 +3448,7 @@
           <a:p>
             <a:fld id="{C9FA13D6-D6C5-4753-B411-D5F0E6B6DDF9}" type="slidenum">
               <a:rPr lang="es-CO" smtClean="0"/>
-              <a:t>‹#›</a:t>
+              <a:t>‹Nº›</a:t>
             </a:fld>
             <a:endParaRPr lang="es-CO"/>
           </a:p>
@@ -3666,7 +3692,7 @@
           <a:p>
             <a:fld id="{4BDFF068-0152-4120-B6A9-271E27CA5DFE}" type="datetimeFigureOut">
               <a:rPr lang="es-CO" smtClean="0"/>
-              <a:t>12/02/2025</a:t>
+              <a:t>21/02/2025</a:t>
             </a:fld>
             <a:endParaRPr lang="es-CO"/>
           </a:p>
@@ -3720,7 +3746,7 @@
           <a:p>
             <a:fld id="{F426A9E8-DD17-4D1B-BEB9-FBDC766E7EE7}" type="slidenum">
               <a:rPr lang="es-CO" smtClean="0"/>
-              <a:t>‹#›</a:t>
+              <a:t>‹Nº›</a:t>
             </a:fld>
             <a:endParaRPr lang="es-CO"/>
           </a:p>
@@ -3882,7 +3908,7 @@
           <a:p>
             <a:fld id="{4BDFF068-0152-4120-B6A9-271E27CA5DFE}" type="datetimeFigureOut">
               <a:rPr lang="es-CO" smtClean="0"/>
-              <a:t>12/02/2025</a:t>
+              <a:t>21/02/2025</a:t>
             </a:fld>
             <a:endParaRPr lang="es-CO"/>
           </a:p>
@@ -3936,7 +3962,7 @@
           <a:p>
             <a:fld id="{F426A9E8-DD17-4D1B-BEB9-FBDC766E7EE7}" type="slidenum">
               <a:rPr lang="es-CO" smtClean="0"/>
-              <a:t>‹#›</a:t>
+              <a:t>‹Nº›</a:t>
             </a:fld>
             <a:endParaRPr lang="es-CO"/>
           </a:p>
@@ -4098,7 +4124,7 @@
           <a:p>
             <a:fld id="{4BDFF068-0152-4120-B6A9-271E27CA5DFE}" type="datetimeFigureOut">
               <a:rPr lang="es-CO" smtClean="0"/>
-              <a:t>12/02/2025</a:t>
+              <a:t>21/02/2025</a:t>
             </a:fld>
             <a:endParaRPr lang="es-CO"/>
           </a:p>
@@ -4152,7 +4178,7 @@
           <a:p>
             <a:fld id="{F426A9E8-DD17-4D1B-BEB9-FBDC766E7EE7}" type="slidenum">
               <a:rPr lang="es-CO" smtClean="0"/>
-              <a:t>‹#›</a:t>
+              <a:t>‹Nº›</a:t>
             </a:fld>
             <a:endParaRPr lang="es-CO"/>
           </a:p>
@@ -4374,7 +4400,7 @@
           <a:p>
             <a:fld id="{08ED071E-B8F8-4C7C-BF2C-3088DF2A4B41}" type="datetimeFigureOut">
               <a:rPr lang="es-CO" smtClean="0"/>
-              <a:t>12/02/2025</a:t>
+              <a:t>21/02/2025</a:t>
             </a:fld>
             <a:endParaRPr lang="es-CO"/>
           </a:p>
@@ -4428,7 +4454,7 @@
           <a:p>
             <a:fld id="{C9FA13D6-D6C5-4753-B411-D5F0E6B6DDF9}" type="slidenum">
               <a:rPr lang="es-CO" smtClean="0"/>
-              <a:t>‹#›</a:t>
+              <a:t>‹Nº›</a:t>
             </a:fld>
             <a:endParaRPr lang="es-CO"/>
           </a:p>
@@ -4642,7 +4668,7 @@
           <a:p>
             <a:fld id="{08ED071E-B8F8-4C7C-BF2C-3088DF2A4B41}" type="datetimeFigureOut">
               <a:rPr lang="es-CO" smtClean="0"/>
-              <a:t>12/02/2025</a:t>
+              <a:t>21/02/2025</a:t>
             </a:fld>
             <a:endParaRPr lang="es-CO"/>
           </a:p>
@@ -4696,7 +4722,7 @@
           <a:p>
             <a:fld id="{C9FA13D6-D6C5-4753-B411-D5F0E6B6DDF9}" type="slidenum">
               <a:rPr lang="es-CO" smtClean="0"/>
-              <a:t>‹#›</a:t>
+              <a:t>‹Nº›</a:t>
             </a:fld>
             <a:endParaRPr lang="es-CO"/>
           </a:p>
@@ -5057,7 +5083,7 @@
           <a:p>
             <a:fld id="{08ED071E-B8F8-4C7C-BF2C-3088DF2A4B41}" type="datetimeFigureOut">
               <a:rPr lang="es-CO" smtClean="0"/>
-              <a:t>12/02/2025</a:t>
+              <a:t>21/02/2025</a:t>
             </a:fld>
             <a:endParaRPr lang="es-CO"/>
           </a:p>
@@ -5111,7 +5137,7 @@
           <a:p>
             <a:fld id="{C9FA13D6-D6C5-4753-B411-D5F0E6B6DDF9}" type="slidenum">
               <a:rPr lang="es-CO" smtClean="0"/>
-              <a:t>‹#›</a:t>
+              <a:t>‹Nº›</a:t>
             </a:fld>
             <a:endParaRPr lang="es-CO"/>
           </a:p>
@@ -5199,7 +5225,7 @@
           <a:p>
             <a:fld id="{08ED071E-B8F8-4C7C-BF2C-3088DF2A4B41}" type="datetimeFigureOut">
               <a:rPr lang="es-CO" smtClean="0"/>
-              <a:t>12/02/2025</a:t>
+              <a:t>21/02/2025</a:t>
             </a:fld>
             <a:endParaRPr lang="es-CO"/>
           </a:p>
@@ -5253,7 +5279,7 @@
           <a:p>
             <a:fld id="{C9FA13D6-D6C5-4753-B411-D5F0E6B6DDF9}" type="slidenum">
               <a:rPr lang="es-CO" smtClean="0"/>
-              <a:t>‹#›</a:t>
+              <a:t>‹Nº›</a:t>
             </a:fld>
             <a:endParaRPr lang="es-CO"/>
           </a:p>
@@ -5312,7 +5338,7 @@
           <a:p>
             <a:fld id="{08ED071E-B8F8-4C7C-BF2C-3088DF2A4B41}" type="datetimeFigureOut">
               <a:rPr lang="es-CO" smtClean="0"/>
-              <a:t>12/02/2025</a:t>
+              <a:t>21/02/2025</a:t>
             </a:fld>
             <a:endParaRPr lang="es-CO"/>
           </a:p>
@@ -5366,7 +5392,7 @@
           <a:p>
             <a:fld id="{C9FA13D6-D6C5-4753-B411-D5F0E6B6DDF9}" type="slidenum">
               <a:rPr lang="es-CO" smtClean="0"/>
-              <a:t>‹#›</a:t>
+              <a:t>‹Nº›</a:t>
             </a:fld>
             <a:endParaRPr lang="es-CO"/>
           </a:p>
@@ -5625,7 +5651,7 @@
           <a:p>
             <a:fld id="{08ED071E-B8F8-4C7C-BF2C-3088DF2A4B41}" type="datetimeFigureOut">
               <a:rPr lang="es-CO" smtClean="0"/>
-              <a:t>12/02/2025</a:t>
+              <a:t>21/02/2025</a:t>
             </a:fld>
             <a:endParaRPr lang="es-CO"/>
           </a:p>
@@ -5679,7 +5705,7 @@
           <a:p>
             <a:fld id="{C9FA13D6-D6C5-4753-B411-D5F0E6B6DDF9}" type="slidenum">
               <a:rPr lang="es-CO" smtClean="0"/>
-              <a:t>‹#›</a:t>
+              <a:t>‹Nº›</a:t>
             </a:fld>
             <a:endParaRPr lang="es-CO"/>
           </a:p>
@@ -5914,7 +5940,7 @@
           <a:p>
             <a:fld id="{08ED071E-B8F8-4C7C-BF2C-3088DF2A4B41}" type="datetimeFigureOut">
               <a:rPr lang="es-CO" smtClean="0"/>
-              <a:t>12/02/2025</a:t>
+              <a:t>21/02/2025</a:t>
             </a:fld>
             <a:endParaRPr lang="es-CO"/>
           </a:p>
@@ -5968,7 +5994,7 @@
           <a:p>
             <a:fld id="{C9FA13D6-D6C5-4753-B411-D5F0E6B6DDF9}" type="slidenum">
               <a:rPr lang="es-CO" smtClean="0"/>
-              <a:t>‹#›</a:t>
+              <a:t>‹Nº›</a:t>
             </a:fld>
             <a:endParaRPr lang="es-CO"/>
           </a:p>
@@ -6157,7 +6183,7 @@
           <a:p>
             <a:fld id="{08ED071E-B8F8-4C7C-BF2C-3088DF2A4B41}" type="datetimeFigureOut">
               <a:rPr lang="es-CO" smtClean="0"/>
-              <a:t>12/02/2025</a:t>
+              <a:t>21/02/2025</a:t>
             </a:fld>
             <a:endParaRPr lang="es-CO"/>
           </a:p>
@@ -6247,7 +6273,7 @@
           <a:p>
             <a:fld id="{C9FA13D6-D6C5-4753-B411-D5F0E6B6DDF9}" type="slidenum">
               <a:rPr lang="es-CO" smtClean="0"/>
-              <a:t>‹#›</a:t>
+              <a:t>‹Nº›</a:t>
             </a:fld>
             <a:endParaRPr lang="es-CO"/>
           </a:p>
@@ -6718,7 +6744,7 @@
           <a:p>
             <a:fld id="{F426A9E8-DD17-4D1B-BEB9-FBDC766E7EE7}" type="slidenum">
               <a:rPr lang="es-CO" smtClean="0"/>
-              <a:t>‹#›</a:t>
+              <a:t>‹Nº›</a:t>
             </a:fld>
             <a:endParaRPr lang="es-CO"/>
           </a:p>
@@ -12345,25 +12371,28 @@
           <a:p>
             <a:pPr algn="just"/>
             <a:r>
-              <a:rPr lang="es-MX"/>
+              <a:rPr lang="es-MX" dirty="0"/>
               <a:t>Ingresar al link: </a:t>
             </a:r>
             <a:r>
-              <a:rPr lang="es-CO" b="1">
+              <a:rPr lang="es-CO" dirty="0">
                 <a:solidFill>
                   <a:srgbClr val="0070C0"/>
                 </a:solidFill>
-                <a:hlinkClick r:id="rId2">
-                  <a:extLst>
-                    <a:ext uri="{A12FA001-AC4F-418D-AE19-62706E023703}">
-                      <ahyp:hlinkClr xmlns:ahyp="http://schemas.microsoft.com/office/drawing/2018/hyperlinkcolor" val="tx"/>
-                    </a:ext>
-                  </a:extLst>
-                </a:hlinkClick>
               </a:rPr>
-              <a:t>https://www.ragged.com.co/RaggedDigital</a:t>
-            </a:r>
-            <a:endParaRPr lang="es-CO" b="1">
+              <a:t>https://</a:t>
+            </a:r>
+            <a:r>
+              <a:rPr lang="es-CO" dirty="0">
+                <a:solidFill>
+                  <a:srgbClr val="0070C0"/>
+                </a:solidFill>
+                <a:ea typeface="+mn-lt"/>
+                <a:cs typeface="+mn-lt"/>
+              </a:rPr>
+              <a:t>ragged.app/RaggedDigital/Login</a:t>
+            </a:r>
+            <a:endParaRPr lang="es-CO" b="1" dirty="0">
               <a:solidFill>
                 <a:srgbClr val="0070C0"/>
               </a:solidFill>
@@ -12376,7 +12405,7 @@
           <a:p>
             <a:pPr algn="just"/>
             <a:r>
-              <a:rPr lang="es-MX"/>
+              <a:rPr lang="es-MX" dirty="0"/>
               <a:t>Ingresar con el usuario y contraseña asignado y sigue los siguientes pasos:</a:t>
             </a:r>
           </a:p>
@@ -12397,7 +12426,7 @@
           <p:nvPr/>
         </p:nvPicPr>
         <p:blipFill>
-          <a:blip r:embed="rId3"/>
+          <a:blip r:embed="rId2"/>
           <a:stretch>
             <a:fillRect/>
           </a:stretch>
@@ -12427,7 +12456,7 @@
           <p:nvPr/>
         </p:nvPicPr>
         <p:blipFill>
-          <a:blip r:embed="rId4">
+          <a:blip r:embed="rId3">
             <a:extLst>
               <a:ext uri="{28A0092B-C50C-407E-A947-70E740481C1C}">
                 <a14:useLocalDpi xmlns:a14="http://schemas.microsoft.com/office/drawing/2010/main" val="0"/>
